--- a/decks/geog-resources/geog-resources_ch1_what-is-a-resource.pptx
+++ b/decks/geog-resources/geog-resources_ch1_what-is-a-resource.pptx
@@ -126,30 +126,30 @@
   <p:extLst>
     <p:ext uri="{521415D9-36F7-43E2-AB2F-B90AF26B5E84}">
       <p14:sectionLst xmlns:p14="http://schemas.microsoft.com/office/powerpoint/2010/main">
-        <p14:section name="Opening" id="{01e18a68-3cf6-874a-fc90-1c9f2c325b8c}">
+        <p14:section name="Opening" id="{57400cc9-f8f8-3cb5-86c0-34ed8beb0d04}">
           <p14:sldIdLst>
             <p14:sldId id="256"/>
           </p14:sldIdLst>
         </p14:section>
-        <p14:section name="Gate" id="{8513c8cd-3885-6fe0-3fe1-41425d9a6c32}">
+        <p14:section name="Gate" id="{7e3ee88a-c169-88a5-adbf-6e6ef780cb2d}">
           <p14:sldIdLst>
             <p14:sldId id="257"/>
             <p14:sldId id="258"/>
           </p14:sldIdLst>
         </p14:section>
-        <p14:section name="Pre-teach" id="{1e0fd8df-79ca-9b82-4c03-705b15c143f0}">
+        <p14:section name="Pre-teach" id="{1a578297-5de8-73ce-2926-c9bf1beda180}">
           <p14:sldIdLst>
             <p14:sldId id="259"/>
             <p14:sldId id="260"/>
           </p14:sldIdLst>
         </p14:section>
-        <p14:section name="Read-along" id="{0662548b-505f-c4ef-b68f-e31aef0f4133}">
+        <p14:section name="Read-along" id="{12d6c6e6-6cd6-690a-3bb2-34094f9c08a3}">
           <p14:sldIdLst>
             <p14:sldId id="261"/>
             <p14:sldId id="262"/>
           </p14:sldIdLst>
         </p14:section>
-        <p14:section name="Teach" id="{1c77c90b-ea80-f563-42cc-8d28649e636f}">
+        <p14:section name="Teach" id="{c8cd871b-b8ab-29ee-6aca-5575bfe9380a}">
           <p14:sldIdLst>
             <p14:sldId id="263"/>
             <p14:sldId id="264"/>
@@ -158,7 +158,7 @@
             <p14:sldId id="267"/>
           </p14:sldIdLst>
         </p14:section>
-        <p14:section name="Routes" id="{645ff5ea-ff99-2c84-1552-c223f2533b5d}">
+        <p14:section name="Routes" id="{7fca7743-0010-1f86-3ae7-0f1913bd31cd}">
           <p14:sldIdLst>
             <p14:sldId id="268"/>
             <p14:sldId id="269"/>
@@ -166,12 +166,12 @@
             <p14:sldId id="271"/>
           </p14:sldIdLst>
         </p14:section>
-        <p14:section name="Close" id="{686d0c3c-1e4c-6c9b-0570-4953e0dab55a}">
+        <p14:section name="Close" id="{396f3418-a5a5-c04a-430c-0357ac491b4d}">
           <p14:sldIdLst>
             <p14:sldId id="272"/>
           </p14:sldIdLst>
         </p14:section>
-        <p14:section name="Answers" id="{487f8684-f2ad-26fe-effd-826ad40edcb1}">
+        <p14:section name="Answers" id="{135443b5-c953-800a-0ea6-ca2d54b5ef3d}">
           <p14:sldIdLst>
             <p14:sldId id="273"/>
             <p14:sldId id="274"/>
